--- a/01 Elementi Razvoja Softvera/02 Prezentacije/PPTX/03_Poslovna_logika_i_use_case.pptx
+++ b/01 Elementi Razvoja Softvera/02 Prezentacije/PPTX/03_Poslovna_logika_i_use_case.pptx
@@ -11256,7 +11256,7 @@
                 <a:ea typeface="Aptos Display"/>
                 <a:cs typeface="Aptos Display"/>
               </a:rPr>
-              <a:t>2</a:t>
+              <a:t>1</a:t>
             </a:r>
           </a:p>
         </p:txBody>
@@ -11312,7 +11312,7 @@
                 <a:ea typeface="Aptos Display"/>
                 <a:cs typeface="Aptos Display"/>
               </a:rPr>
-              <a:t>кључна use-case-а</a:t>
+              <a:t>вертикални пролаз</a:t>
             </a:r>
           </a:p>
         </p:txBody>
@@ -11368,7 +11368,7 @@
                 <a:ea typeface="Aptos"/>
                 <a:cs typeface="Aptos"/>
               </a:rPr>
-              <a:t>До контролне тачке треба имати најмање два use-case-а са експлицитним улазима, резултатима и јасним границама одговорности.</a:t>
+              <a:t>P2 је после Вежбе 4, недеља од 02.11: најмање један вертикални пролаз кроз систем, од захтева до резултата, са јасним границама одговорности.</a:t>
             </a:r>
           </a:p>
         </p:txBody>
@@ -11731,7 +11731,7 @@
                 <a:ea typeface="Aptos"/>
                 <a:cs typeface="Aptos"/>
               </a:rPr>
-              <a:t>Провера обухвата централно понашање, границе одговорности и стабилне исходе.</a:t>
+              <a:t>Провера обухвата архитектонске границе, вертикални пролаз и стабилне исходе.</a:t>
             </a:r>
           </a:p>
         </p:txBody>
@@ -11843,7 +11843,7 @@
                 <a:ea typeface="Aptos"/>
                 <a:cs typeface="Aptos"/>
               </a:rPr>
-              <a:t>Имплементирати најмање два кључна use-case-а.</a:t>
+              <a:t>Документовати одговорност сваког слоја и смер зависности.</a:t>
             </a:r>
           </a:p>
         </p:txBody>
@@ -11955,7 +11955,7 @@
                 <a:ea typeface="Aptos"/>
                 <a:cs typeface="Aptos"/>
               </a:rPr>
-              <a:t>Пословна правила не расипати по controller-у, менију и repository-ју.</a:t>
+              <a:t>Имплементирати најмање један вертикални пролаз кроз систем.</a:t>
             </a:r>
           </a:p>
         </p:txBody>
@@ -12179,7 +12179,7 @@
                 <a:ea typeface="Aptos"/>
                 <a:cs typeface="Aptos"/>
               </a:rPr>
-              <a:t>Спољне зависности уводити кроз уговоре и composition root.</a:t>
+              <a:t>Domain и Application тестирати без базе и корисничког интерфејса.</a:t>
             </a:r>
           </a:p>
         </p:txBody>
@@ -12291,7 +12291,7 @@
                 <a:ea typeface="Aptos"/>
                 <a:cs typeface="Aptos"/>
               </a:rPr>
-              <a:t>У PR-у описати најмање једну архитектонску одлуку.</a:t>
+              <a:t>Термин: недеља од 02.11., после Вежбе 4.</a:t>
             </a:r>
           </a:p>
         </p:txBody>

--- a/01 Elementi Razvoja Softvera/02 Prezentacije/PPTX/03_Poslovna_logika_i_use_case.pptx
+++ b/01 Elementi Razvoja Softvera/02 Prezentacije/PPTX/03_Poslovna_logika_i_use_case.pptx
@@ -13543,83 +13543,6 @@
               </a:rPr>
               <a:t>,</a:t>
             </a:r>
-            <a:r>
-              <a:rPr sz="1032">
-                <a:solidFill>
-                  <a:srgbClr val="262B36"/>
-                </a:solidFill>
-                <a:latin typeface="Consolas"/>
-                <a:ea typeface="Consolas"/>
-                <a:cs typeface="Consolas"/>
-              </a:rPr>
-              <a:t> </a:t>
-            </a:r>
-            <a:r>
-              <a:rPr sz="1032" b="1">
-                <a:solidFill>
-                  <a:srgbClr val="7442C8"/>
-                </a:solidFill>
-                <a:latin typeface="Consolas"/>
-                <a:ea typeface="Consolas"/>
-                <a:cs typeface="Consolas"/>
-              </a:rPr>
-              <a:t>Is</a:t>
-            </a:r>
-            <a:r>
-              <a:rPr sz="1032">
-                <a:solidFill>
-                  <a:srgbClr val="5C6574"/>
-                </a:solidFill>
-                <a:latin typeface="Consolas"/>
-                <a:ea typeface="Consolas"/>
-                <a:cs typeface="Consolas"/>
-              </a:rPr>
-              <a:t>.</a:t>
-            </a:r>
-            <a:r>
-              <a:rPr sz="1032" b="1">
-                <a:solidFill>
-                  <a:srgbClr val="7442C8"/>
-                </a:solidFill>
-                <a:latin typeface="Consolas"/>
-                <a:ea typeface="Consolas"/>
-                <a:cs typeface="Consolas"/>
-              </a:rPr>
-              <a:t>EqualTo</a:t>
-            </a:r>
-            <a:r>
-              <a:rPr sz="1032">
-                <a:solidFill>
-                  <a:srgbClr val="5C6574"/>
-                </a:solidFill>
-                <a:latin typeface="Consolas"/>
-                <a:ea typeface="Consolas"/>
-                <a:cs typeface="Consolas"/>
-              </a:rPr>
-              <a:t>(</a:t>
-            </a:r>
-            <a:r>
-              <a:rPr sz="1032">
-                <a:solidFill>
-                  <a:srgbClr val="A95921"/>
-                </a:solidFill>
-                <a:latin typeface="Consolas"/>
-                <a:ea typeface="Consolas"/>
-                <a:cs typeface="Consolas"/>
-              </a:rPr>
-              <a:t>"</a:t>
-            </a:r>
-            <a:r>
-              <a:rPr sz="1032" b="1">
-                <a:solidFill>
-                  <a:srgbClr val="7442C8"/>
-                </a:solidFill>
-                <a:latin typeface="Consolas"/>
-                <a:ea typeface="Consolas"/>
-                <a:cs typeface="Consolas"/>
-              </a:rPr>
-              <a:t>OverlappingReservatio</a:t>
-            </a:r>
           </a:p>
           <a:p xmlns:a="http://schemas.openxmlformats.org/drawingml/2006/main">
             <a:pPr>
@@ -13654,7 +13577,73 @@
                 <a:ea typeface="Consolas"/>
                 <a:cs typeface="Consolas"/>
               </a:rPr>
-              <a:t>    n</a:t>
+              <a:t>    </a:t>
+            </a:r>
+            <a:r>
+              <a:rPr sz="1032" b="1">
+                <a:solidFill>
+                  <a:srgbClr val="7442C8"/>
+                </a:solidFill>
+                <a:latin typeface="Consolas"/>
+                <a:ea typeface="Consolas"/>
+                <a:cs typeface="Consolas"/>
+              </a:rPr>
+              <a:t>Is</a:t>
+            </a:r>
+            <a:r>
+              <a:rPr sz="1032">
+                <a:solidFill>
+                  <a:srgbClr val="5C6574"/>
+                </a:solidFill>
+                <a:latin typeface="Consolas"/>
+                <a:ea typeface="Consolas"/>
+                <a:cs typeface="Consolas"/>
+              </a:rPr>
+              <a:t>.</a:t>
+            </a:r>
+            <a:r>
+              <a:rPr sz="1032" b="1">
+                <a:solidFill>
+                  <a:srgbClr val="7442C8"/>
+                </a:solidFill>
+                <a:latin typeface="Consolas"/>
+                <a:ea typeface="Consolas"/>
+                <a:cs typeface="Consolas"/>
+              </a:rPr>
+              <a:t>EqualTo</a:t>
+            </a:r>
+            <a:r>
+              <a:rPr sz="1032">
+                <a:solidFill>
+                  <a:srgbClr val="5C6574"/>
+                </a:solidFill>
+                <a:latin typeface="Consolas"/>
+                <a:ea typeface="Consolas"/>
+                <a:cs typeface="Consolas"/>
+              </a:rPr>
+              <a:t>(</a:t>
+            </a:r>
+            <a:r>
+              <a:rPr sz="1032">
+                <a:solidFill>
+                  <a:srgbClr val="A95921"/>
+                </a:solidFill>
+                <a:latin typeface="Consolas"/>
+                <a:ea typeface="Consolas"/>
+                <a:cs typeface="Consolas"/>
+              </a:rPr>
+              <a:t>"</a:t>
+            </a:r>
+            <a:r>
+              <a:rPr sz="1032" b="1">
+                <a:solidFill>
+                  <a:srgbClr val="7442C8"/>
+                </a:solidFill>
+                <a:latin typeface="Consolas"/>
+                <a:ea typeface="Consolas"/>
+                <a:cs typeface="Consolas"/>
+              </a:rPr>
+              <a:t>OverlappingReservation</a:t>
             </a:r>
             <a:r>
               <a:rPr sz="1032">
@@ -18573,7 +18562,7 @@
         </p:nvSpPr>
         <p:spPr>
           <a:xfrm xmlns:a="http://schemas.openxmlformats.org/drawingml/2006/main">
-            <a:off x="1051560" y="3391739"/>
+            <a:off x="1051560" y="3730000"/>
             <a:ext cx="6949440" cy="10972"/>
           </a:xfrm>
           <a:prstGeom xmlns:a="http://schemas.openxmlformats.org/drawingml/2006/main" prst="rect">
